--- a/slides_fr.pptx
+++ b/slides_fr.pptx
@@ -15550,7 +15550,7 @@
               </a:lnSpc>
             </a:pPr>
             <a:r>
-              <a:rPr lang="en-US" sz="8400" b="1" u="none" strike="noStrike">
+              <a:rPr lang="en-US" sz="8300" b="1" u="none" strike="noStrike">
                 <a:solidFill>
                   <a:srgbClr val="00FF41"/>
                 </a:solidFill>
@@ -22916,7 +22916,7 @@
               </a:lnSpc>
             </a:pPr>
             <a:r>
-              <a:rPr lang="en-US" sz="4200" b="1" u="none" strike="noStrike">
+              <a:rPr lang="en-US" sz="3250" b="1" u="none" strike="noStrike">
                 <a:solidFill>
                   <a:srgbClr val="00FF41"/>
                 </a:solidFill>
@@ -24773,7 +24773,7 @@
               </a:lnSpc>
             </a:pPr>
             <a:r>
-              <a:rPr lang="en-US" sz="3600" b="0" u="none" strike="noStrike">
+              <a:rPr lang="en-US" sz="3300" b="0" u="none" strike="noStrike">
                 <a:solidFill>
                   <a:srgbClr val="FFFFFF"/>
                 </a:solidFill>
@@ -24891,7 +24891,7 @@
           </a:bodyPr>
           <a:p>
             <a:r>
-              <a:rPr lang="en-US" sz="2400" b="0" u="none" strike="noStrike">
+              <a:rPr lang="en-US" sz="2150" b="0" u="none" strike="noStrike">
                 <a:solidFill>
                   <a:srgbClr val="FFFFFF"/>
                 </a:solidFill>
@@ -24961,7 +24961,7 @@
           </a:bodyPr>
           <a:p>
             <a:r>
-              <a:rPr lang="en-US" sz="2400" b="0" u="none" strike="noStrike">
+              <a:rPr lang="en-US" sz="2150" b="0" u="none" strike="noStrike">
                 <a:solidFill>
                   <a:srgbClr val="FFFFFF"/>
                 </a:solidFill>
@@ -25018,7 +25018,7 @@
               </a:lnSpc>
             </a:pPr>
             <a:r>
-              <a:rPr lang="en-US" sz="3600" b="1" u="none" strike="noStrike">
+              <a:rPr lang="en-US" sz="3300" b="1" u="none" strike="noStrike">
                 <a:solidFill>
                   <a:srgbClr val="00FF41"/>
                 </a:solidFill>
@@ -25647,7 +25647,7 @@
               </a:lnSpc>
             </a:pPr>
             <a:r>
-              <a:rPr lang="en-US" sz="2000" b="0" u="none" strike="noStrike">
+              <a:rPr lang="en-US" sz="1950" b="0" u="none" strike="noStrike">
                 <a:solidFill>
                   <a:srgbClr val="FFFFFF"/>
                 </a:solidFill>
@@ -25874,7 +25874,7 @@
               </a:lnSpc>
             </a:pPr>
             <a:r>
-              <a:rPr lang="en-US" sz="2000" b="0" u="none" strike="noStrike">
+              <a:rPr lang="en-US" sz="1950" b="0" u="none" strike="noStrike">
                 <a:solidFill>
                   <a:srgbClr val="FFFFFF"/>
                 </a:solidFill>
@@ -27622,7 +27622,7 @@
               </a:lnSpc>
             </a:pPr>
             <a:r>
-              <a:rPr lang="en-US" sz="2400" b="1" u="none" strike="noStrike">
+              <a:rPr lang="en-US" sz="2250" b="1" u="none" strike="noStrike">
                 <a:solidFill>
                   <a:srgbClr val="00FF41"/>
                 </a:solidFill>
@@ -28363,7 +28363,7 @@
               </a:lnSpc>
             </a:pPr>
             <a:r>
-              <a:rPr lang="en-US" sz="4200" b="1" u="none" strike="noStrike">
+              <a:rPr lang="en-US" sz="3000" b="1" u="none" strike="noStrike">
                 <a:solidFill>
                   <a:srgbClr val="00FF41"/>
                 </a:solidFill>
@@ -29881,7 +29881,7 @@
               </a:lnSpc>
             </a:pPr>
             <a:r>
-              <a:rPr lang="en-US" sz="4200" b="1" u="none" strike="noStrike">
+              <a:rPr lang="en-US" sz="3400" b="1" u="none" strike="noStrike">
                 <a:solidFill>
                   <a:srgbClr val="00FF41"/>
                 </a:solidFill>
@@ -29994,7 +29994,7 @@
               </a:lnSpc>
             </a:pPr>
             <a:r>
-              <a:rPr lang="en-US" sz="4400" b="0" u="none" strike="noStrike">
+              <a:rPr lang="en-US" sz="3700" b="0" u="none" strike="noStrike">
                 <a:solidFill>
                   <a:srgbClr val="FFFFFF"/>
                 </a:solidFill>
@@ -30051,7 +30051,7 @@
               </a:lnSpc>
             </a:pPr>
             <a:r>
-              <a:rPr lang="en-US" sz="4400" b="1" u="none" strike="noStrike">
+              <a:rPr lang="en-US" sz="3700" b="1" u="none" strike="noStrike">
                 <a:solidFill>
                   <a:srgbClr val="00FF41"/>
                 </a:solidFill>
@@ -30373,7 +30373,7 @@
               </a:lnSpc>
             </a:pPr>
             <a:r>
-              <a:rPr lang="en-US" sz="3600" b="1" u="none" strike="noStrike">
+              <a:rPr lang="en-US" sz="2900" b="1" u="none" strike="noStrike">
                 <a:solidFill>
                   <a:srgbClr val="00FF41"/>
                 </a:solidFill>
@@ -31360,7 +31360,7 @@
               </a:lnSpc>
             </a:pPr>
             <a:r>
-              <a:rPr lang="en-US" sz="1800" b="1" u="none" strike="noStrike">
+              <a:rPr lang="en-US" sz="1600" b="1" u="none" strike="noStrike">
                 <a:solidFill>
                   <a:srgbClr val="FF6B35"/>
                 </a:solidFill>
@@ -31764,7 +31764,7 @@
               </a:lnSpc>
             </a:pPr>
             <a:r>
-              <a:rPr lang="en-US" sz="5400" b="1" u="none" strike="noStrike">
+              <a:rPr lang="en-US" sz="4200" b="1" u="none" strike="noStrike">
                 <a:solidFill>
                   <a:srgbClr val="00FF41"/>
                 </a:solidFill>
@@ -33328,7 +33328,7 @@
               </a:lnSpc>
             </a:pPr>
             <a:r>
-              <a:rPr lang="en-US" sz="2600" b="0" u="none" strike="noStrike">
+              <a:rPr lang="en-US" sz="2500" b="0" u="none" strike="noStrike">
                 <a:solidFill>
                   <a:srgbClr val="00D4FF"/>
                 </a:solidFill>
@@ -33763,7 +33763,7 @@
               </a:lnSpc>
             </a:pPr>
             <a:r>
-              <a:rPr lang="en-US" sz="2300" b="1" u="none" strike="noStrike">
+              <a:rPr lang="en-US" sz="2150" b="1" u="none" strike="noStrike">
                 <a:solidFill>
                   <a:srgbClr val="00D4FF"/>
                 </a:solidFill>
@@ -33774,7 +33774,7 @@
               <a:t>● </a:t>
             </a:r>
             <a:r>
-              <a:rPr lang="en-US" sz="2300" b="0" u="none" strike="noStrike">
+              <a:rPr lang="en-US" sz="2150" b="0" u="none" strike="noStrike">
                 <a:solidFill>
                   <a:srgbClr val="FFFFFF"/>
                 </a:solidFill>
@@ -33800,7 +33800,7 @@
               </a:lnSpc>
             </a:pPr>
             <a:r>
-              <a:rPr lang="en-US" sz="2300" b="1" u="none" strike="noStrike">
+              <a:rPr lang="en-US" sz="2150" b="1" u="none" strike="noStrike">
                 <a:solidFill>
                   <a:srgbClr val="00D4FF"/>
                 </a:solidFill>
@@ -33811,7 +33811,7 @@
               <a:t>● </a:t>
             </a:r>
             <a:r>
-              <a:rPr lang="en-US" sz="2300" b="0" u="none" strike="noStrike">
+              <a:rPr lang="en-US" sz="2150" b="0" u="none" strike="noStrike">
                 <a:solidFill>
                   <a:srgbClr val="FFFFFF"/>
                 </a:solidFill>
@@ -33837,7 +33837,7 @@
               </a:lnSpc>
             </a:pPr>
             <a:r>
-              <a:rPr lang="en-US" sz="2300" b="1" u="none" strike="noStrike">
+              <a:rPr lang="en-US" sz="2150" b="1" u="none" strike="noStrike">
                 <a:solidFill>
                   <a:srgbClr val="00D4FF"/>
                 </a:solidFill>
@@ -33848,7 +33848,7 @@
               <a:t>● </a:t>
             </a:r>
             <a:r>
-              <a:rPr lang="en-US" sz="2300" b="0" u="none" strike="noStrike">
+              <a:rPr lang="en-US" sz="2150" b="0" u="none" strike="noStrike">
                 <a:solidFill>
                   <a:srgbClr val="FFFFFF"/>
                 </a:solidFill>
@@ -33874,7 +33874,7 @@
               </a:lnSpc>
             </a:pPr>
             <a:r>
-              <a:rPr lang="en-US" sz="2300" b="1" u="none" strike="noStrike">
+              <a:rPr lang="en-US" sz="2150" b="1" u="none" strike="noStrike">
                 <a:solidFill>
                   <a:srgbClr val="00D4FF"/>
                 </a:solidFill>
@@ -33885,7 +33885,7 @@
               <a:t>● </a:t>
             </a:r>
             <a:r>
-              <a:rPr lang="en-US" sz="2300" b="0" u="none" strike="noStrike">
+              <a:rPr lang="en-US" sz="2150" b="0" u="none" strike="noStrike">
                 <a:solidFill>
                   <a:srgbClr val="FFFFFF"/>
                 </a:solidFill>
@@ -34150,7 +34150,7 @@
               </a:lnSpc>
             </a:pPr>
             <a:r>
-              <a:rPr lang="en-US" sz="5600" b="1" u="none" strike="noStrike">
+              <a:rPr lang="en-US" sz="5250" b="1" u="none" strike="noStrike">
                 <a:solidFill>
                   <a:srgbClr val="FFFFFF"/>
                 </a:solidFill>
@@ -34207,7 +34207,7 @@
               </a:lnSpc>
             </a:pPr>
             <a:r>
-              <a:rPr lang="en-US" sz="5600" b="1" u="none" strike="noStrike">
+              <a:rPr lang="en-US" sz="5250" b="1" u="none" strike="noStrike">
                 <a:solidFill>
                   <a:srgbClr val="FFFFFF"/>
                 </a:solidFill>
@@ -34529,7 +34529,7 @@
               </a:lnSpc>
             </a:pPr>
             <a:r>
-              <a:rPr lang="en-US" sz="4200" b="1" u="none" strike="noStrike">
+              <a:rPr lang="en-US" sz="3200" b="1" u="none" strike="noStrike">
                 <a:solidFill>
                   <a:srgbClr val="FF6B35"/>
                 </a:solidFill>
@@ -36871,7 +36871,7 @@
               </a:lnSpc>
             </a:pPr>
             <a:r>
-              <a:rPr lang="en-US" sz="4200" b="1" u="none" strike="noStrike">
+              <a:rPr lang="en-US" sz="3150" b="1" u="none" strike="noStrike">
                 <a:solidFill>
                   <a:srgbClr val="FF6B35"/>
                 </a:solidFill>
@@ -38099,7 +38099,7 @@
               </a:lnSpc>
             </a:pPr>
             <a:r>
-              <a:rPr lang="en-US" sz="4200" b="1" u="none" strike="noStrike">
+              <a:rPr lang="en-US" sz="1700" b="1" u="none" strike="noStrike">
                 <a:solidFill>
                   <a:srgbClr val="FF6B35"/>
                 </a:solidFill>
@@ -38713,7 +38713,7 @@
               </a:lnSpc>
             </a:pPr>
             <a:r>
-              <a:rPr lang="en-US" sz="4200" b="1" u="none" strike="noStrike">
+              <a:rPr lang="en-US" sz="3600" b="1" u="none" strike="noStrike">
                 <a:solidFill>
                   <a:srgbClr val="FF6B35"/>
                 </a:solidFill>
@@ -38883,7 +38883,7 @@
               </a:lnSpc>
             </a:pPr>
             <a:r>
-              <a:rPr lang="en-US" sz="2300" b="1" u="none" strike="noStrike">
+              <a:rPr lang="en-US" sz="2050" b="1" u="none" strike="noStrike">
                 <a:solidFill>
                   <a:srgbClr val="00D4FF"/>
                 </a:solidFill>
@@ -38894,7 +38894,7 @@
               <a:t>● </a:t>
             </a:r>
             <a:r>
-              <a:rPr lang="en-US" sz="2300" b="0" u="none" strike="noStrike">
+              <a:rPr lang="en-US" sz="2050" b="0" u="none" strike="noStrike">
                 <a:solidFill>
                   <a:srgbClr val="FFFFFF"/>
                 </a:solidFill>
@@ -38920,7 +38920,7 @@
               </a:lnSpc>
             </a:pPr>
             <a:r>
-              <a:rPr lang="en-US" sz="2300" b="1" u="none" strike="noStrike">
+              <a:rPr lang="en-US" sz="2050" b="1" u="none" strike="noStrike">
                 <a:solidFill>
                   <a:srgbClr val="00D4FF"/>
                 </a:solidFill>
@@ -38931,7 +38931,7 @@
               <a:t>● </a:t>
             </a:r>
             <a:r>
-              <a:rPr lang="en-US" sz="2300" b="0" u="none" strike="noStrike">
+              <a:rPr lang="en-US" sz="2050" b="0" u="none" strike="noStrike">
                 <a:solidFill>
                   <a:srgbClr val="FFFFFF"/>
                 </a:solidFill>
@@ -38957,7 +38957,7 @@
               </a:lnSpc>
             </a:pPr>
             <a:r>
-              <a:rPr lang="en-US" sz="2300" b="1" u="none" strike="noStrike">
+              <a:rPr lang="en-US" sz="2050" b="1" u="none" strike="noStrike">
                 <a:solidFill>
                   <a:srgbClr val="00D4FF"/>
                 </a:solidFill>
@@ -38968,7 +38968,7 @@
               <a:t>● </a:t>
             </a:r>
             <a:r>
-              <a:rPr lang="en-US" sz="2300" b="0" u="none" strike="noStrike">
+              <a:rPr lang="en-US" sz="2050" b="0" u="none" strike="noStrike">
                 <a:solidFill>
                   <a:srgbClr val="FFFFFF"/>
                 </a:solidFill>
@@ -38994,7 +38994,7 @@
               </a:lnSpc>
             </a:pPr>
             <a:r>
-              <a:rPr lang="en-US" sz="2300" b="1" u="none" strike="noStrike">
+              <a:rPr lang="en-US" sz="2050" b="1" u="none" strike="noStrike">
                 <a:solidFill>
                   <a:srgbClr val="00D4FF"/>
                 </a:solidFill>
@@ -39005,7 +39005,7 @@
               <a:t>● </a:t>
             </a:r>
             <a:r>
-              <a:rPr lang="en-US" sz="2300" b="0" u="none" strike="noStrike">
+              <a:rPr lang="en-US" sz="2050" b="0" u="none" strike="noStrike">
                 <a:solidFill>
                   <a:srgbClr val="FFFFFF"/>
                 </a:solidFill>
@@ -39327,7 +39327,7 @@
               </a:lnSpc>
             </a:pPr>
             <a:r>
-              <a:rPr lang="en-US" sz="4200" b="1" u="none" strike="noStrike">
+              <a:rPr lang="en-US" sz="2850" b="1" u="none" strike="noStrike">
                 <a:solidFill>
                   <a:srgbClr val="FF6B35"/>
                 </a:solidFill>
@@ -39941,7 +39941,7 @@
               </a:lnSpc>
             </a:pPr>
             <a:r>
-              <a:rPr lang="en-US" sz="4200" b="1" u="none" strike="noStrike">
+              <a:rPr lang="en-US" sz="3500" b="1" u="none" strike="noStrike">
                 <a:solidFill>
                   <a:srgbClr val="FF6B35"/>
                 </a:solidFill>
@@ -40111,7 +40111,7 @@
               </a:lnSpc>
             </a:pPr>
             <a:r>
-              <a:rPr lang="en-US" sz="2300" b="1" u="none" strike="noStrike">
+              <a:rPr lang="en-US" sz="2050" b="1" u="none" strike="noStrike">
                 <a:solidFill>
                   <a:srgbClr val="00D4FF"/>
                 </a:solidFill>
@@ -40122,7 +40122,7 @@
               <a:t>● </a:t>
             </a:r>
             <a:r>
-              <a:rPr lang="en-US" sz="2300" b="0" u="none" strike="noStrike">
+              <a:rPr lang="en-US" sz="2050" b="0" u="none" strike="noStrike">
                 <a:solidFill>
                   <a:srgbClr val="FFFFFF"/>
                 </a:solidFill>
@@ -40148,7 +40148,7 @@
               </a:lnSpc>
             </a:pPr>
             <a:r>
-              <a:rPr lang="en-US" sz="2300" b="1" u="none" strike="noStrike">
+              <a:rPr lang="en-US" sz="2050" b="1" u="none" strike="noStrike">
                 <a:solidFill>
                   <a:srgbClr val="00D4FF"/>
                 </a:solidFill>
@@ -40159,7 +40159,7 @@
               <a:t>● </a:t>
             </a:r>
             <a:r>
-              <a:rPr lang="en-US" sz="2300" b="0" u="none" strike="noStrike">
+              <a:rPr lang="en-US" sz="2050" b="0" u="none" strike="noStrike">
                 <a:solidFill>
                   <a:srgbClr val="FFFFFF"/>
                 </a:solidFill>
@@ -40185,7 +40185,7 @@
               </a:lnSpc>
             </a:pPr>
             <a:r>
-              <a:rPr lang="en-US" sz="2300" b="1" u="none" strike="noStrike">
+              <a:rPr lang="en-US" sz="2050" b="1" u="none" strike="noStrike">
                 <a:solidFill>
                   <a:srgbClr val="00D4FF"/>
                 </a:solidFill>
@@ -40196,7 +40196,7 @@
               <a:t>● </a:t>
             </a:r>
             <a:r>
-              <a:rPr lang="en-US" sz="2300" b="0" u="none" strike="noStrike">
+              <a:rPr lang="en-US" sz="2050" b="0" u="none" strike="noStrike">
                 <a:solidFill>
                   <a:srgbClr val="FFFFFF"/>
                 </a:solidFill>
@@ -40222,7 +40222,7 @@
               </a:lnSpc>
             </a:pPr>
             <a:r>
-              <a:rPr lang="en-US" sz="2300" b="1" u="none" strike="noStrike">
+              <a:rPr lang="en-US" sz="2050" b="1" u="none" strike="noStrike">
                 <a:solidFill>
                   <a:srgbClr val="00D4FF"/>
                 </a:solidFill>
@@ -40233,7 +40233,7 @@
               <a:t>● </a:t>
             </a:r>
             <a:r>
-              <a:rPr lang="en-US" sz="2300" b="0" u="none" strike="noStrike">
+              <a:rPr lang="en-US" sz="2050" b="0" u="none" strike="noStrike">
                 <a:solidFill>
                   <a:srgbClr val="FFFFFF"/>
                 </a:solidFill>
@@ -40731,7 +40731,7 @@
               </a:lnSpc>
             </a:pPr>
             <a:r>
-              <a:rPr lang="en-US" sz="2400" b="1" u="none" strike="noStrike">
+              <a:rPr lang="en-US" sz="2300" b="1" u="none" strike="noStrike">
                 <a:solidFill>
                   <a:srgbClr val="00FF41"/>
                 </a:solidFill>
@@ -40788,7 +40788,7 @@
               </a:lnSpc>
             </a:pPr>
             <a:r>
-              <a:rPr lang="en-US" sz="3000" b="1" u="none" strike="noStrike">
+              <a:rPr lang="en-US" sz="2800" b="1" u="none" strike="noStrike">
                 <a:solidFill>
                   <a:srgbClr val="00D4FF"/>
                 </a:solidFill>
@@ -40799,7 +40799,7 @@
               <a:t>▶ </a:t>
             </a:r>
             <a:r>
-              <a:rPr lang="en-US" sz="3000" b="0" u="none" strike="noStrike">
+              <a:rPr lang="en-US" sz="2800" b="0" u="none" strike="noStrike">
                 <a:solidFill>
                   <a:srgbClr val="FFFFFF"/>
                 </a:solidFill>
@@ -40825,7 +40825,7 @@
               </a:lnSpc>
             </a:pPr>
             <a:r>
-              <a:rPr lang="en-US" sz="3000" b="1" u="none" strike="noStrike">
+              <a:rPr lang="en-US" sz="2800" b="1" u="none" strike="noStrike">
                 <a:solidFill>
                   <a:srgbClr val="00D4FF"/>
                 </a:solidFill>
@@ -40836,7 +40836,7 @@
               <a:t>▶ </a:t>
             </a:r>
             <a:r>
-              <a:rPr lang="en-US" sz="3000" b="0" u="none" strike="noStrike">
+              <a:rPr lang="en-US" sz="2800" b="0" u="none" strike="noStrike">
                 <a:solidFill>
                   <a:srgbClr val="FFFFFF"/>
                 </a:solidFill>
@@ -40862,7 +40862,7 @@
               </a:lnSpc>
             </a:pPr>
             <a:r>
-              <a:rPr lang="en-US" sz="3000" b="1" u="none" strike="noStrike">
+              <a:rPr lang="en-US" sz="2800" b="1" u="none" strike="noStrike">
                 <a:solidFill>
                   <a:srgbClr val="00D4FF"/>
                 </a:solidFill>
@@ -40873,7 +40873,7 @@
               <a:t>▶ </a:t>
             </a:r>
             <a:r>
-              <a:rPr lang="en-US" sz="3000" b="0" u="none" strike="noStrike">
+              <a:rPr lang="en-US" sz="2800" b="0" u="none" strike="noStrike">
                 <a:solidFill>
                   <a:srgbClr val="FFFFFF"/>
                 </a:solidFill>
@@ -40899,7 +40899,7 @@
               </a:lnSpc>
             </a:pPr>
             <a:r>
-              <a:rPr lang="en-US" sz="3000" b="1" u="none" strike="noStrike">
+              <a:rPr lang="en-US" sz="2800" b="1" u="none" strike="noStrike">
                 <a:solidFill>
                   <a:srgbClr val="00D4FF"/>
                 </a:solidFill>
@@ -40910,7 +40910,7 @@
               <a:t>▶ </a:t>
             </a:r>
             <a:r>
-              <a:rPr lang="en-US" sz="3000" b="0" u="none" strike="noStrike">
+              <a:rPr lang="en-US" sz="2800" b="0" u="none" strike="noStrike">
                 <a:solidFill>
                   <a:srgbClr val="FFFFFF"/>
                 </a:solidFill>
@@ -41231,7 +41231,7 @@
               </a:lnSpc>
             </a:pPr>
             <a:r>
-              <a:rPr lang="en-US" sz="2800" b="1" u="none" strike="noStrike">
+              <a:rPr lang="en-US" sz="2150" b="1" u="none" strike="noStrike">
                 <a:solidFill>
                   <a:srgbClr val="00D4FF"/>
                 </a:solidFill>
@@ -41242,7 +41242,7 @@
               <a:t>✓ </a:t>
             </a:r>
             <a:r>
-              <a:rPr lang="en-US" sz="2800" b="0" u="none" strike="noStrike">
+              <a:rPr lang="en-US" sz="2150" b="0" u="none" strike="noStrike">
                 <a:solidFill>
                   <a:srgbClr val="FFFFFF"/>
                 </a:solidFill>
@@ -41268,7 +41268,7 @@
               </a:lnSpc>
             </a:pPr>
             <a:r>
-              <a:rPr lang="en-US" sz="2800" b="1" u="none" strike="noStrike">
+              <a:rPr lang="en-US" sz="2150" b="1" u="none" strike="noStrike">
                 <a:solidFill>
                   <a:srgbClr val="00D4FF"/>
                 </a:solidFill>
@@ -41279,7 +41279,7 @@
               <a:t>✓ </a:t>
             </a:r>
             <a:r>
-              <a:rPr lang="en-US" sz="2800" b="0" u="none" strike="noStrike">
+              <a:rPr lang="en-US" sz="2150" b="0" u="none" strike="noStrike">
                 <a:solidFill>
                   <a:srgbClr val="FFFFFF"/>
                 </a:solidFill>
@@ -41305,7 +41305,7 @@
               </a:lnSpc>
             </a:pPr>
             <a:r>
-              <a:rPr lang="en-US" sz="2800" b="1" u="none" strike="noStrike">
+              <a:rPr lang="en-US" sz="2150" b="1" u="none" strike="noStrike">
                 <a:solidFill>
                   <a:srgbClr val="00D4FF"/>
                 </a:solidFill>
@@ -41316,7 +41316,7 @@
               <a:t>✓ </a:t>
             </a:r>
             <a:r>
-              <a:rPr lang="en-US" sz="2800" b="0" u="none" strike="noStrike">
+              <a:rPr lang="en-US" sz="2150" b="0" u="none" strike="noStrike">
                 <a:solidFill>
                   <a:srgbClr val="FFFFFF"/>
                 </a:solidFill>
@@ -41342,7 +41342,7 @@
               </a:lnSpc>
             </a:pPr>
             <a:r>
-              <a:rPr lang="en-US" sz="2800" b="1" u="none" strike="noStrike">
+              <a:rPr lang="en-US" sz="2150" b="1" u="none" strike="noStrike">
                 <a:solidFill>
                   <a:srgbClr val="00D4FF"/>
                 </a:solidFill>
@@ -41353,7 +41353,7 @@
               <a:t>✓ </a:t>
             </a:r>
             <a:r>
-              <a:rPr lang="en-US" sz="2800" b="0" u="none" strike="noStrike">
+              <a:rPr lang="en-US" sz="2150" b="0" u="none" strike="noStrike">
                 <a:solidFill>
                   <a:srgbClr val="FFFFFF"/>
                 </a:solidFill>
@@ -41379,7 +41379,7 @@
               </a:lnSpc>
             </a:pPr>
             <a:r>
-              <a:rPr lang="en-US" sz="2800" b="1" u="none" strike="noStrike">
+              <a:rPr lang="en-US" sz="2150" b="1" u="none" strike="noStrike">
                 <a:solidFill>
                   <a:srgbClr val="00D4FF"/>
                 </a:solidFill>
@@ -41390,7 +41390,7 @@
               <a:t>✓ </a:t>
             </a:r>
             <a:r>
-              <a:rPr lang="en-US" sz="2800" b="0" u="none" strike="noStrike">
+              <a:rPr lang="en-US" sz="2150" b="0" u="none" strike="noStrike">
                 <a:solidFill>
                   <a:srgbClr val="FFFFFF"/>
                 </a:solidFill>
@@ -41598,7 +41598,7 @@
               </a:lnSpc>
             </a:pPr>
             <a:r>
-              <a:rPr lang="en-US" sz="4200" b="1" u="none" strike="noStrike">
+              <a:rPr lang="en-US" sz="4100" b="1" u="none" strike="noStrike">
                 <a:solidFill>
                   <a:srgbClr val="00FF41"/>
                 </a:solidFill>
@@ -41996,7 +41996,7 @@
               </a:lnSpc>
             </a:pPr>
             <a:r>
-              <a:rPr lang="en-US" sz="2600" b="0" u="none" strike="noStrike">
+              <a:rPr lang="en-US" sz="2400" b="0" u="none" strike="noStrike">
                 <a:solidFill>
                   <a:srgbClr val="FFFFFF"/>
                 </a:solidFill>
@@ -42224,7 +42224,7 @@
               </a:lnSpc>
             </a:pPr>
             <a:r>
-              <a:rPr lang="en-US" sz="2600" b="0" u="none" strike="noStrike">
+              <a:rPr lang="en-US" sz="2400" b="0" u="none" strike="noStrike">
                 <a:solidFill>
                   <a:srgbClr val="FFFFFF"/>
                 </a:solidFill>
@@ -42602,7 +42602,7 @@
               </a:lnSpc>
             </a:pPr>
             <a:r>
-              <a:rPr lang="en-US" sz="2600" b="1" u="none" strike="noStrike">
+              <a:rPr lang="en-US" sz="2550" b="1" u="none" strike="noStrike">
                 <a:solidFill>
                   <a:srgbClr val="FFFFFF"/>
                 </a:solidFill>
@@ -43551,7 +43551,7 @@
               </a:lnSpc>
             </a:pPr>
             <a:r>
-              <a:rPr lang="en-US" sz="5800" b="1" u="none" strike="noStrike">
+              <a:rPr lang="en-US" sz="4850" b="1" u="none" strike="noStrike">
                 <a:solidFill>
                   <a:srgbClr val="FFFFFF"/>
                 </a:solidFill>
@@ -43608,7 +43608,7 @@
               </a:lnSpc>
             </a:pPr>
             <a:r>
-              <a:rPr lang="en-US" sz="5800" b="1" u="none" strike="noStrike">
+              <a:rPr lang="en-US" sz="4850" b="1" u="none" strike="noStrike">
                 <a:solidFill>
                   <a:srgbClr val="00FF41"/>
                 </a:solidFill>
@@ -43778,7 +43778,7 @@
               </a:lnSpc>
             </a:pPr>
             <a:r>
-              <a:rPr lang="en-US" sz="2800" b="1" u="none" strike="noStrike">
+              <a:rPr lang="en-US" sz="1800" b="1" u="none" strike="noStrike">
                 <a:solidFill>
                   <a:srgbClr val="CCCCD6"/>
                 </a:solidFill>
@@ -45903,7 +45903,7 @@
               </a:lnSpc>
             </a:pPr>
             <a:r>
-              <a:rPr lang="en-US" sz="18000" b="1" u="none" strike="noStrike">
+              <a:rPr lang="en-US" sz="10100" b="1" u="none" strike="noStrike">
                 <a:solidFill>
                   <a:srgbClr val="00FF41"/>
                 </a:solidFill>
@@ -46224,7 +46224,7 @@
               </a:lnSpc>
             </a:pPr>
             <a:r>
-              <a:rPr lang="en-US" sz="4000" b="1" u="none" strike="noStrike">
+              <a:rPr lang="en-US" sz="3200" b="1" u="none" strike="noStrike">
                 <a:solidFill>
                   <a:srgbClr val="FFFFFF"/>
                 </a:solidFill>
@@ -46338,7 +46338,7 @@
               </a:lnSpc>
             </a:pPr>
             <a:r>
-              <a:rPr lang="en-US" sz="2600" b="1" u="none" strike="noStrike">
+              <a:rPr lang="en-US" sz="2300" b="1" u="none" strike="noStrike">
                 <a:solidFill>
                   <a:srgbClr val="00D4FF"/>
                 </a:solidFill>
@@ -46349,7 +46349,7 @@
               <a:t>▶ </a:t>
             </a:r>
             <a:r>
-              <a:rPr lang="en-US" sz="2600" b="0" u="none" strike="noStrike">
+              <a:rPr lang="en-US" sz="2300" b="0" u="none" strike="noStrike">
                 <a:solidFill>
                   <a:srgbClr val="FFFFFF"/>
                 </a:solidFill>
@@ -46375,7 +46375,7 @@
               </a:lnSpc>
             </a:pPr>
             <a:r>
-              <a:rPr lang="en-US" sz="2600" b="1" u="none" strike="noStrike">
+              <a:rPr lang="en-US" sz="2300" b="1" u="none" strike="noStrike">
                 <a:solidFill>
                   <a:srgbClr val="00D4FF"/>
                 </a:solidFill>
@@ -46386,7 +46386,7 @@
               <a:t>▶ </a:t>
             </a:r>
             <a:r>
-              <a:rPr lang="en-US" sz="2600" b="0" u="none" strike="noStrike">
+              <a:rPr lang="en-US" sz="2300" b="0" u="none" strike="noStrike">
                 <a:solidFill>
                   <a:srgbClr val="FFFFFF"/>
                 </a:solidFill>
@@ -46412,7 +46412,7 @@
               </a:lnSpc>
             </a:pPr>
             <a:r>
-              <a:rPr lang="en-US" sz="2600" b="1" u="none" strike="noStrike">
+              <a:rPr lang="en-US" sz="2300" b="1" u="none" strike="noStrike">
                 <a:solidFill>
                   <a:srgbClr val="00D4FF"/>
                 </a:solidFill>
@@ -46423,7 +46423,7 @@
               <a:t>▶ </a:t>
             </a:r>
             <a:r>
-              <a:rPr lang="en-US" sz="2600" b="0" u="none" strike="noStrike">
+              <a:rPr lang="en-US" sz="2300" b="0" u="none" strike="noStrike">
                 <a:solidFill>
                   <a:srgbClr val="FFFFFF"/>
                 </a:solidFill>
@@ -47713,7 +47713,7 @@
               </a:lnSpc>
             </a:pPr>
             <a:r>
-              <a:rPr lang="en-US" sz="2800" b="0" u="none" strike="noStrike">
+              <a:rPr lang="en-US" sz="2750" b="0" u="none" strike="noStrike">
                 <a:solidFill>
                   <a:srgbClr val="FFFFFF"/>
                 </a:solidFill>
@@ -47978,7 +47978,7 @@
               </a:lnSpc>
             </a:pPr>
             <a:r>
-              <a:rPr lang="en-US" sz="4200" b="1" u="none" strike="noStrike">
+              <a:rPr lang="en-US" sz="3000" b="1" u="none" strike="noStrike">
                 <a:solidFill>
                   <a:srgbClr val="00FF41"/>
                 </a:solidFill>
@@ -48262,7 +48262,7 @@
               </a:lnSpc>
             </a:pPr>
             <a:r>
-              <a:rPr lang="en-US" sz="2000" b="0" u="none" strike="noStrike">
+              <a:rPr lang="en-US" sz="1600" b="0" u="none" strike="noStrike">
                 <a:solidFill>
                   <a:srgbClr val="CCCCD6"/>
                 </a:solidFill>
@@ -48319,7 +48319,7 @@
               </a:lnSpc>
             </a:pPr>
             <a:r>
-              <a:rPr lang="en-US" sz="2200" b="1" u="none" strike="noStrike">
+              <a:rPr lang="en-US" sz="1600" b="1" u="none" strike="noStrike">
                 <a:solidFill>
                   <a:srgbClr val="00D4FF"/>
                 </a:solidFill>
@@ -48490,7 +48490,7 @@
               </a:lnSpc>
             </a:pPr>
             <a:r>
-              <a:rPr lang="en-US" sz="2000" b="0" u="none" strike="noStrike">
+              <a:rPr lang="en-US" sz="1850" b="0" u="none" strike="noStrike">
                 <a:solidFill>
                   <a:srgbClr val="CCCCD6"/>
                 </a:solidFill>
@@ -48718,7 +48718,7 @@
               </a:lnSpc>
             </a:pPr>
             <a:r>
-              <a:rPr lang="en-US" sz="2000" b="0" u="none" strike="noStrike">
+              <a:rPr lang="en-US" sz="1600" b="0" u="none" strike="noStrike">
                 <a:solidFill>
                   <a:srgbClr val="CCCCD6"/>
                 </a:solidFill>
@@ -48946,7 +48946,7 @@
               </a:lnSpc>
             </a:pPr>
             <a:r>
-              <a:rPr lang="en-US" sz="2000" b="0" u="none" strike="noStrike">
+              <a:rPr lang="en-US" sz="1900" b="0" u="none" strike="noStrike">
                 <a:solidFill>
                   <a:srgbClr val="CCCCD6"/>
                 </a:solidFill>
@@ -49174,7 +49174,7 @@
               </a:lnSpc>
             </a:pPr>
             <a:r>
-              <a:rPr lang="en-US" sz="2000" b="0" u="none" strike="noStrike">
+              <a:rPr lang="en-US" sz="1600" b="0" u="none" strike="noStrike">
                 <a:solidFill>
                   <a:srgbClr val="CCCCD6"/>
                 </a:solidFill>
@@ -49630,7 +49630,7 @@
               </a:lnSpc>
             </a:pPr>
             <a:r>
-              <a:rPr lang="en-US" sz="2000" b="0" u="none" strike="noStrike">
+              <a:rPr lang="en-US" sz="1850" b="0" u="none" strike="noStrike">
                 <a:solidFill>
                   <a:srgbClr val="CCCCD6"/>
                 </a:solidFill>
@@ -49858,7 +49858,7 @@
               </a:lnSpc>
             </a:pPr>
             <a:r>
-              <a:rPr lang="en-US" sz="2000" b="0" u="none" strike="noStrike">
+              <a:rPr lang="en-US" sz="1600" b="0" u="none" strike="noStrike">
                 <a:solidFill>
                   <a:srgbClr val="CCCCD6"/>
                 </a:solidFill>
@@ -50086,7 +50086,7 @@
               </a:lnSpc>
             </a:pPr>
             <a:r>
-              <a:rPr lang="en-US" sz="2000" b="0" u="none" strike="noStrike">
+              <a:rPr lang="en-US" sz="1800" b="0" u="none" strike="noStrike">
                 <a:solidFill>
                   <a:srgbClr val="CCCCD6"/>
                 </a:solidFill>
@@ -52670,7 +52670,7 @@
               </a:lnSpc>
             </a:pPr>
             <a:r>
-              <a:rPr lang="en-US" sz="1800" b="0" u="none" strike="noStrike">
+              <a:rPr lang="en-US" sz="1650" b="0" u="none" strike="noStrike">
                 <a:solidFill>
                   <a:srgbClr val="CCCCD6"/>
                 </a:solidFill>
